--- a/03_Shared/05_Workshop_Presentations/ECS_INT_Workshop_Modernizing_the_Core.pptx
+++ b/03_Shared/05_Workshop_Presentations/ECS_INT_Workshop_Modernizing_the_Core.pptx
@@ -12952,6 +12952,10 @@
             <a:prstDash val="solid"/>
           </a:ln>
         </p:spPr>
+        <p:txBody>
+          <a:bodyPr/>
+          <a:p/>
+        </p:txBody>
       </p:sp>
       <p:sp>
         <p:nvSpPr>
@@ -13122,6 +13126,10 @@
             <a:prstDash val="solid"/>
           </a:ln>
         </p:spPr>
+        <p:txBody>
+          <a:bodyPr/>
+          <a:p/>
+        </p:txBody>
       </p:sp>
       <p:sp>
         <p:nvSpPr>
@@ -13147,6 +13155,10 @@
             <a:prstDash val="solid"/>
           </a:ln>
         </p:spPr>
+        <p:txBody>
+          <a:bodyPr/>
+          <a:p/>
+        </p:txBody>
       </p:sp>
       <p:sp>
         <p:nvSpPr>
@@ -13208,6 +13220,10 @@
             <a:prstDash val="solid"/>
           </a:ln>
         </p:spPr>
+        <p:txBody>
+          <a:bodyPr/>
+          <a:p/>
+        </p:txBody>
       </p:sp>
       <p:sp>
         <p:nvSpPr>
@@ -13230,140 +13246,144 @@
           <a:bodyPr wrap="square" rtlCol="0" anchor="t"/>
           <a:lstStyle/>
           <a:p>
-            <a:pPr indent="0" marL="0">
-              <a:buNone/>
-            </a:pPr>
-            <a:r>
-              <a:rPr lang="en-US" sz="1100" dirty="0">
-                <a:solidFill>
-                  <a:srgbClr val="334155"/>
-                </a:solidFill>
-                <a:latin typeface="Calibri" pitchFamily="34" charset="0"/>
-                <a:ea typeface="Calibri" pitchFamily="34" charset="-122"/>
-                <a:cs typeface="Calibri" pitchFamily="34" charset="-120"/>
-              </a:rPr>
-              <a:t>✓  Activating and configuring OOTB features</a:t>
-            </a:r>
-            <a:endParaRPr lang="en-US" sz="1100" dirty="0"/>
-          </a:p>
-          <a:p>
-            <a:pPr indent="0" marL="0">
-              <a:buNone/>
-            </a:pPr>
-            <a:r>
-              <a:rPr lang="en-US" sz="1100" dirty="0">
-                <a:solidFill>
-                  <a:srgbClr val="334155"/>
-                </a:solidFill>
-                <a:latin typeface="Calibri" pitchFamily="34" charset="0"/>
-                <a:ea typeface="Calibri" pitchFamily="34" charset="-122"/>
-                <a:cs typeface="Calibri" pitchFamily="34" charset="-120"/>
-              </a:rPr>
-              <a:t>✓  Setting up categories and taxonomies</a:t>
-            </a:r>
-            <a:endParaRPr lang="en-US" sz="1100" dirty="0"/>
-          </a:p>
-          <a:p>
-            <a:pPr indent="0" marL="0">
-              <a:buNone/>
-            </a:pPr>
-            <a:r>
-              <a:rPr lang="en-US" sz="1100" dirty="0">
-                <a:solidFill>
-                  <a:srgbClr val="334155"/>
-                </a:solidFill>
-                <a:latin typeface="Calibri" pitchFamily="34" charset="0"/>
-                <a:ea typeface="Calibri" pitchFamily="34" charset="-122"/>
-                <a:cs typeface="Calibri" pitchFamily="34" charset="-120"/>
-              </a:rPr>
-              <a:t>✓  Building assignment rules and routing logic</a:t>
-            </a:r>
-            <a:endParaRPr lang="en-US" sz="1100" dirty="0"/>
-          </a:p>
-          <a:p>
-            <a:pPr indent="0" marL="0">
-              <a:buNone/>
-            </a:pPr>
-            <a:r>
-              <a:rPr lang="en-US" sz="1100" dirty="0">
-                <a:solidFill>
-                  <a:srgbClr val="334155"/>
-                </a:solidFill>
-                <a:latin typeface="Calibri" pitchFamily="34" charset="0"/>
-                <a:ea typeface="Calibri" pitchFamily="34" charset="-122"/>
-                <a:cs typeface="Calibri" pitchFamily="34" charset="-120"/>
-              </a:rPr>
-              <a:t>✓  Defining SLA targets and schedules</a:t>
-            </a:r>
-            <a:endParaRPr lang="en-US" sz="1100" dirty="0"/>
-          </a:p>
-          <a:p>
-            <a:pPr indent="0" marL="0">
-              <a:buNone/>
-            </a:pPr>
-            <a:r>
-              <a:rPr lang="en-US" sz="1100" dirty="0">
-                <a:solidFill>
-                  <a:srgbClr val="334155"/>
-                </a:solidFill>
-                <a:latin typeface="Calibri" pitchFamily="34" charset="0"/>
-                <a:ea typeface="Calibri" pitchFamily="34" charset="-122"/>
-                <a:cs typeface="Calibri" pitchFamily="34" charset="-120"/>
-              </a:rPr>
-              <a:t>✓  Configuring notifications and email templates</a:t>
-            </a:r>
-            <a:endParaRPr lang="en-US" sz="1100" dirty="0"/>
-          </a:p>
-          <a:p>
-            <a:pPr indent="0" marL="0">
-              <a:buNone/>
-            </a:pPr>
-            <a:r>
-              <a:rPr lang="en-US" sz="1100" dirty="0">
-                <a:solidFill>
-                  <a:srgbClr val="334155"/>
-                </a:solidFill>
-                <a:latin typeface="Calibri" pitchFamily="34" charset="0"/>
-                <a:ea typeface="Calibri" pitchFamily="34" charset="-122"/>
-                <a:cs typeface="Calibri" pitchFamily="34" charset="-120"/>
-              </a:rPr>
-              <a:t>✓  Enabling AI features (PI, Now Assist, Virtual Agent)</a:t>
-            </a:r>
-            <a:endParaRPr lang="en-US" sz="1100" dirty="0"/>
-          </a:p>
-          <a:p>
-            <a:pPr indent="0" marL="0">
-              <a:buNone/>
-            </a:pPr>
-            <a:r>
-              <a:rPr lang="en-US" sz="1100" dirty="0">
-                <a:solidFill>
-                  <a:srgbClr val="334155"/>
-                </a:solidFill>
-                <a:latin typeface="Calibri" pitchFamily="34" charset="0"/>
-                <a:ea typeface="Calibri" pitchFamily="34" charset="-122"/>
-                <a:cs typeface="Calibri" pitchFamily="34" charset="-120"/>
-              </a:rPr>
-              <a:t>✓  Building reports and PA indicators</a:t>
-            </a:r>
-            <a:endParaRPr lang="en-US" sz="1100" dirty="0"/>
-          </a:p>
-          <a:p>
-            <a:pPr indent="0" marL="0">
-              <a:buNone/>
-            </a:pPr>
-            <a:r>
-              <a:rPr lang="en-US" sz="1100" dirty="0">
-                <a:solidFill>
-                  <a:srgbClr val="334155"/>
-                </a:solidFill>
-                <a:latin typeface="Calibri" pitchFamily="34" charset="0"/>
-                <a:ea typeface="Calibri" pitchFamily="34" charset="-122"/>
-                <a:cs typeface="Calibri" pitchFamily="34" charset="-120"/>
-              </a:rPr>
-              <a:t>✓  Setting system properties and thresholds</a:t>
-            </a:r>
-            <a:endParaRPr lang="en-US" sz="1100" dirty="0"/>
+            <a:r>
+              <a:rPr lang="en-US" dirty="0" sz="1100">
+                <a:solidFill>
+                  <a:srgbClr val="16A34A"/>
+                </a:solidFill>
+                <a:latin typeface="Calibri"/>
+              </a:rPr>
+              <a:t>✓  </a:t>
+            </a:r>
+            <a:r>
+              <a:rPr lang="en-US" dirty="0" sz="1100">
+                <a:solidFill>
+                  <a:srgbClr val="1A1A1A"/>
+                </a:solidFill>
+                <a:latin typeface="Calibri"/>
+              </a:rPr>
+              <a:t>LDAP Data Source (AD import)</a:t>
+            </a:r>
+          </a:p>
+          <a:p>
+            <a:r>
+              <a:rPr lang="en-US" dirty="0" sz="1100">
+                <a:solidFill>
+                  <a:srgbClr val="16A34A"/>
+                </a:solidFill>
+                <a:latin typeface="Calibri"/>
+              </a:rPr>
+              <a:t>✓  </a:t>
+            </a:r>
+            <a:r>
+              <a:rPr lang="en-US" dirty="0" sz="1100">
+                <a:solidFill>
+                  <a:srgbClr val="1A1A1A"/>
+                </a:solidFill>
+                <a:latin typeface="Calibri"/>
+              </a:rPr>
+              <a:t>User and group attribute mapping</a:t>
+            </a:r>
+          </a:p>
+          <a:p>
+            <a:r>
+              <a:rPr lang="en-US" dirty="0" sz="1100">
+                <a:solidFill>
+                  <a:srgbClr val="16A34A"/>
+                </a:solidFill>
+                <a:latin typeface="Calibri"/>
+              </a:rPr>
+              <a:t>✓  </a:t>
+            </a:r>
+            <a:r>
+              <a:rPr lang="en-US" dirty="0" sz="1100">
+                <a:solidFill>
+                  <a:srgbClr val="1A1A1A"/>
+                </a:solidFill>
+                <a:latin typeface="Calibri"/>
+              </a:rPr>
+              <a:t>SAML 2.0 IdP metadata</a:t>
+            </a:r>
+          </a:p>
+          <a:p>
+            <a:r>
+              <a:rPr lang="en-US" dirty="0" sz="1100">
+                <a:solidFill>
+                  <a:srgbClr val="16A34A"/>
+                </a:solidFill>
+                <a:latin typeface="Calibri"/>
+              </a:rPr>
+              <a:t>✓  </a:t>
+            </a:r>
+            <a:r>
+              <a:rPr lang="en-US" dirty="0" sz="1100">
+                <a:solidFill>
+                  <a:srgbClr val="1A1A1A"/>
+                </a:solidFill>
+                <a:latin typeface="Calibri"/>
+              </a:rPr>
+              <a:t>MID Server install and validation</a:t>
+            </a:r>
+          </a:p>
+          <a:p>
+            <a:r>
+              <a:rPr lang="en-US" dirty="0" sz="1100">
+                <a:solidFill>
+                  <a:srgbClr val="16A34A"/>
+                </a:solidFill>
+                <a:latin typeface="Calibri"/>
+              </a:rPr>
+              <a:t>✓  </a:t>
+            </a:r>
+            <a:r>
+              <a:rPr lang="en-US" dirty="0" sz="1100">
+                <a:solidFill>
+                  <a:srgbClr val="1A1A1A"/>
+                </a:solidFill>
+                <a:latin typeface="Calibri"/>
+              </a:rPr>
+              <a:t>SCCM SGC</a:t>
+            </a:r>
+          </a:p>
+          <a:p>
+            <a:r>
+              <a:rPr lang="en-US" dirty="0" sz="1100">
+                <a:solidFill>
+                  <a:srgbClr val="16A34A"/>
+                </a:solidFill>
+                <a:latin typeface="Calibri"/>
+              </a:rPr>
+              <a:t>✓  </a:t>
+            </a:r>
+            <a:r>
+              <a:rPr lang="en-US" dirty="0" sz="1100">
+                <a:solidFill>
+                  <a:srgbClr val="1A1A1A"/>
+                </a:solidFill>
+                <a:latin typeface="Calibri"/>
+              </a:rPr>
+              <a:t>Intune SGC</a:t>
+            </a:r>
+          </a:p>
+          <a:p>
+            <a:r>
+              <a:rPr lang="en-US" dirty="0" sz="1100">
+                <a:solidFill>
+                  <a:srgbClr val="16A34A"/>
+                </a:solidFill>
+                <a:latin typeface="Calibri"/>
+              </a:rPr>
+              <a:t>✓  </a:t>
+            </a:r>
+            <a:r>
+              <a:rPr lang="en-US" dirty="0" sz="1100">
+                <a:solidFill>
+                  <a:srgbClr val="1A1A1A"/>
+                </a:solidFill>
+                <a:latin typeface="Calibri"/>
+              </a:rPr>
+              <a:t>Import schedule</a:t>
+            </a:r>
           </a:p>
         </p:txBody>
       </p:sp>
@@ -13391,6 +13411,10 @@
             <a:prstDash val="solid"/>
           </a:ln>
         </p:spPr>
+        <p:txBody>
+          <a:bodyPr/>
+          <a:p/>
+        </p:txBody>
       </p:sp>
       <p:sp>
         <p:nvSpPr>
@@ -13452,6 +13476,10 @@
             <a:prstDash val="solid"/>
           </a:ln>
         </p:spPr>
+        <p:txBody>
+          <a:bodyPr/>
+          <a:p/>
+        </p:txBody>
       </p:sp>
       <p:sp>
         <p:nvSpPr>
@@ -13474,106 +13502,64 @@
           <a:bodyPr wrap="square" rtlCol="0" anchor="t"/>
           <a:lstStyle/>
           <a:p>
-            <a:pPr indent="0" marL="0">
-              <a:buNone/>
-            </a:pPr>
-            <a:r>
-              <a:rPr lang="en-US" sz="1100" dirty="0">
-                <a:solidFill>
-                  <a:srgbClr val="334155"/>
-                </a:solidFill>
-                <a:latin typeface="Calibri" pitchFamily="34" charset="0"/>
-                <a:ea typeface="Calibri" pitchFamily="34" charset="-122"/>
-                <a:cs typeface="Calibri" pitchFamily="34" charset="-120"/>
-              </a:rPr>
-              <a:t>✗  Adding new fields to OOTB tables</a:t>
-            </a:r>
-            <a:endParaRPr lang="en-US" sz="1100" dirty="0"/>
-          </a:p>
-          <a:p>
-            <a:pPr indent="0" marL="0">
-              <a:buNone/>
-            </a:pPr>
-            <a:r>
-              <a:rPr lang="en-US" sz="1100" dirty="0">
-                <a:solidFill>
-                  <a:srgbClr val="334155"/>
-                </a:solidFill>
-                <a:latin typeface="Calibri" pitchFamily="34" charset="0"/>
-                <a:ea typeface="Calibri" pitchFamily="34" charset="-122"/>
-                <a:cs typeface="Calibri" pitchFamily="34" charset="-120"/>
-              </a:rPr>
-              <a:t>✗  Writing custom business rules or script actions</a:t>
-            </a:r>
-            <a:endParaRPr lang="en-US" sz="1100" dirty="0"/>
-          </a:p>
-          <a:p>
-            <a:pPr indent="0" marL="0">
-              <a:buNone/>
-            </a:pPr>
-            <a:r>
-              <a:rPr lang="en-US" sz="1100" dirty="0">
-                <a:solidFill>
-                  <a:srgbClr val="334155"/>
-                </a:solidFill>
-                <a:latin typeface="Calibri" pitchFamily="34" charset="0"/>
-                <a:ea typeface="Calibri" pitchFamily="34" charset="-122"/>
-                <a:cs typeface="Calibri" pitchFamily="34" charset="-120"/>
-              </a:rPr>
-              <a:t>✗  Creating non-standard CI classes or table extensions</a:t>
-            </a:r>
-            <a:endParaRPr lang="en-US" sz="1100" dirty="0"/>
-          </a:p>
-          <a:p>
-            <a:pPr indent="0" marL="0">
-              <a:buNone/>
-            </a:pPr>
-            <a:r>
-              <a:rPr lang="en-US" sz="1100" dirty="0">
-                <a:solidFill>
-                  <a:srgbClr val="334155"/>
-                </a:solidFill>
-                <a:latin typeface="Calibri" pitchFamily="34" charset="0"/>
-                <a:ea typeface="Calibri" pitchFamily="34" charset="-122"/>
-                <a:cs typeface="Calibri" pitchFamily="34" charset="-120"/>
-              </a:rPr>
-              <a:t>✗  Modifying OOTB workflow stages in code</a:t>
-            </a:r>
-            <a:endParaRPr lang="en-US" sz="1100" dirty="0"/>
-          </a:p>
-          <a:p>
-            <a:pPr indent="0" marL="0">
-              <a:buNone/>
-            </a:pPr>
-            <a:r>
-              <a:rPr lang="en-US" sz="1100" dirty="0">
-                <a:solidFill>
-                  <a:srgbClr val="334155"/>
-                </a:solidFill>
-                <a:latin typeface="Calibri" pitchFamily="34" charset="0"/>
-                <a:ea typeface="Calibri" pitchFamily="34" charset="-122"/>
-                <a:cs typeface="Calibri" pitchFamily="34" charset="-120"/>
-              </a:rPr>
-              <a:t>✗  Building custom client scripts or UI policies</a:t>
-            </a:r>
-            <a:endParaRPr lang="en-US" sz="1100" dirty="0"/>
-          </a:p>
-          <a:p>
-            <a:pPr indent="0" marL="0">
-              <a:buNone/>
-            </a:pPr>
-            <a:r>
-              <a:rPr lang="en-US" sz="1100" dirty="0">
-                <a:solidFill>
-                  <a:srgbClr val="334155"/>
-                </a:solidFill>
-                <a:latin typeface="Calibri" pitchFamily="34" charset="0"/>
-                <a:ea typeface="Calibri" pitchFamily="34" charset="-122"/>
-                <a:cs typeface="Calibri" pitchFamily="34" charset="-120"/>
-              </a:rPr>
-              <a:t>✗  Creating custom REST endpoints outside the catalog</a:t>
-            </a:r>
-            <a:endParaRPr lang="en-US" sz="1100" dirty="0"/>
+            <a:r>
+              <a:rPr lang="en-US" dirty="0" sz="1100">
+                <a:solidFill>
+                  <a:srgbClr val="B91C1C"/>
+                </a:solidFill>
+                <a:latin typeface="Calibri"/>
+              </a:rPr>
+              <a:t>✗  </a:t>
+            </a:r>
+            <a:r>
+              <a:rPr lang="en-US" dirty="0" sz="1100">
+                <a:solidFill>
+                  <a:srgbClr val="1A1A1A"/>
+                </a:solidFill>
+                <a:latin typeface="Calibri"/>
+              </a:rPr>
+              <a:t>Custom LDAP scripts replacing OOTB LDAP import</a:t>
+            </a:r>
+          </a:p>
+          <a:p>
+            <a:r>
+              <a:rPr lang="en-US" dirty="0" sz="1100">
+                <a:solidFill>
+                  <a:srgbClr val="B91C1C"/>
+                </a:solidFill>
+                <a:latin typeface="Calibri"/>
+              </a:rPr>
+              <a:t>✗  </a:t>
+            </a:r>
+            <a:r>
+              <a:rPr lang="en-US" dirty="0" sz="1100">
+                <a:solidFill>
+                  <a:srgbClr val="1A1A1A"/>
+                </a:solidFill>
+                <a:latin typeface="Calibri"/>
+              </a:rPr>
+              <a:t>Custom SSO code outside SAML 2.0 OOTB plugin</a:t>
+            </a:r>
+          </a:p>
+          <a:p>
+            <a:r>
+              <a:rPr lang="en-US" dirty="0" sz="1100">
+                <a:solidFill>
+                  <a:srgbClr val="B91C1C"/>
+                </a:solidFill>
+                <a:latin typeface="Calibri"/>
+              </a:rPr>
+              <a:t>✗  </a:t>
+            </a:r>
+            <a:r>
+              <a:rPr lang="en-US" dirty="0" sz="1100">
+                <a:solidFill>
+                  <a:srgbClr val="1A1A1A"/>
+                </a:solidFill>
+                <a:latin typeface="Calibri"/>
+              </a:rPr>
+              <a:t>Custom MID Server scripts for data already available via SGC</a:t>
+            </a:r>
           </a:p>
         </p:txBody>
       </p:sp>
@@ -13601,6 +13587,10 @@
             <a:prstDash val="solid"/>
           </a:ln>
         </p:spPr>
+        <p:txBody>
+          <a:bodyPr/>
+          <a:p/>
+        </p:txBody>
       </p:sp>
       <p:sp>
         <p:nvSpPr>
